--- a/decks/hist-vikings-saxons/hist-vikings-saxons_ch5_danelaw-alfred.pptx
+++ b/decks/hist-vikings-saxons/hist-vikings-saxons_ch5_danelaw-alfred.pptx
@@ -125,30 +125,30 @@
   <p:extLst>
     <p:ext uri="{521415D9-36F7-43E2-AB2F-B90AF26B5E84}">
       <p14:sectionLst xmlns:p14="http://schemas.microsoft.com/office/powerpoint/2010/main">
-        <p14:section name="Opening" id="{e5394d12-19fa-1d56-40a4-8a5332071fbf}">
+        <p14:section name="Opening" id="{1d696235-15c8-96d5-5ebb-e9edce362746}">
           <p14:sldIdLst>
             <p14:sldId id="256"/>
           </p14:sldIdLst>
         </p14:section>
-        <p14:section name="Gate" id="{57111909-05b3-7b39-3202-754e5b44f8f1}">
+        <p14:section name="Gate" id="{6d71464f-34f8-be4c-db11-57ef9b7403fd}">
           <p14:sldIdLst>
             <p14:sldId id="257"/>
             <p14:sldId id="258"/>
           </p14:sldIdLst>
         </p14:section>
-        <p14:section name="Pre-teach" id="{db78ef17-4f52-6b66-04a5-e4e1ad1346d8}">
+        <p14:section name="Pre-teach" id="{5b03d09c-94ab-2a38-ad42-c020a710dbcb}">
           <p14:sldIdLst>
             <p14:sldId id="259"/>
             <p14:sldId id="260"/>
           </p14:sldIdLst>
         </p14:section>
-        <p14:section name="Read-along" id="{f065ab3d-7124-a5bc-a87b-1c9ab282037f}">
+        <p14:section name="Read-along" id="{5e56a1a0-0591-f746-bc73-b68566d49d25}">
           <p14:sldIdLst>
             <p14:sldId id="261"/>
             <p14:sldId id="262"/>
           </p14:sldIdLst>
         </p14:section>
-        <p14:section name="Teach" id="{2279e19b-6eb1-2f2a-e7ff-6f280ecd8456}">
+        <p14:section name="Teach" id="{8381ff6d-6285-78bf-494e-a84c330a3982}">
           <p14:sldIdLst>
             <p14:sldId id="263"/>
             <p14:sldId id="264"/>
@@ -157,19 +157,19 @@
             <p14:sldId id="267"/>
           </p14:sldIdLst>
         </p14:section>
-        <p14:section name="Routes" id="{0014595b-3d4e-7e13-f277-913b681da0c9}">
+        <p14:section name="Routes" id="{3a35a670-bd19-f6a2-7533-23b2bb337a05}">
           <p14:sldIdLst>
             <p14:sldId id="268"/>
             <p14:sldId id="269"/>
             <p14:sldId id="270"/>
           </p14:sldIdLst>
         </p14:section>
-        <p14:section name="Close" id="{12913db5-19f7-72b8-3af3-fb8369c7bc7d}">
+        <p14:section name="Close" id="{8ed15f06-ea57-b493-902f-da1e354b8c8c}">
           <p14:sldIdLst>
             <p14:sldId id="271"/>
           </p14:sldIdLst>
         </p14:section>
-        <p14:section name="Answers" id="{5ae3be6c-0751-6fcb-1b6d-a467451a098a}">
+        <p14:section name="Answers" id="{27473663-f2c6-8b79-1045-015d3d239c6b}">
           <p14:sldIdLst>
             <p14:sldId id="272"/>
             <p14:sldId id="273"/>
@@ -672,7 +672,7 @@
             <a:r>
               <a:rPr lang="en-US" dirty="0"/>
               <a:t>Teach — Alfred: the king who should never have been king. Say it in your own words, then check understanding with a quick question: ask a pupil from the pre-teach group first, since they met these words and ideas before the lesson. Pupils try to recall before you re-explain.
-Alfred was a sickly child. He had three older brothers who were all supposed to become king before him, so he should never really have been king at all. As a boy he visited shrines and churches, and even met the Pope in Rome. This mattered, because religion was part of everybody's life and the Pope was seen as the link between God and the people on Earth. Alfred outlived all three brothers and became King of Wessex.
+Alfred was a sickly child. He had three older brothers who were all supposed to become king before him, so he should never really have been king at all. As a boy he visited shrines and churches, and even met the Pope in Rome. That mattered. Religion ran through everybody's life, and people looked to the Pope as the one who stood between God and themselves. In the end Alfred outlived all three of his brothers and became King of Wessex.
 Alfred believed that reading and writing were extremely important. He translated many books from Latin, which few people could read, into English, so that more people could understand them. This started a new age of education and literacy in Britain, and some people say it is the reason he was called Great.
 Then Guthrum, a Viking warlord, invaded Wessex. Alfred fled and hid in Somerset, an area the Vikings did not know. While in hiding he put together a Saxon army more capable of fighting the Vikings. When it was big enough he marched to meet Guthrum at Edington, in 878, and after a day of fighting Alfred won. He forced Guthrum back, trapped the Vikings and starved them of food until they surrendered. Guthrum agreed to Alfred's treaty: he became a Christian, went back to the Danelaw and promised never to invade Alfred's kingdom again.
 Tip: Alfred's story in five beats: sickly child, Rome, books, flight to Somerset, Edington.</a:t>
@@ -764,7 +764,7 @@
             <a:r>
               <a:rPr lang="en-US" dirty="0"/>
               <a:t>Teach — Alfred's policies, and the title Great. Say it in your own words, then check understanding with a quick question: ask a pupil from the pre-teach group first, since they met these words and ideas before the lesson. Pupils try to recall before you re-explain.
-After defeating the Vikings, Alfred introduced policies to make sure Wessex was better prepared if they came again. Burhs were towns surrounded by high walls and guard towers, to protect the people living there. Alfred used the burhs to collect tax and store the money, so that more burhs could be built. He also decided that half of the army should always be active, so that it was ready at all times. This was one of the first professional armies in Britain.
+After defeating the Vikings, Alfred introduced policies to make sure Wessex was better prepared if they came again. A burh was a town ringed with high walls and watchtowers, so that the people inside could be defended. Alfred used the burhs to collect tax and store the money, so that more burhs could be built. He also decided that half of the army should always be active, so that it was ready at all times. This was one of the first professional armies in Britain.
 Your lesson asked you to judge how well Alfred dealt with the Vikings. Did he beat them? Yes, at Edington. Did he ever run and hide? Yes, in Somerset. Did he learn from his mistakes and prepare better for the future? Yes: burhs, tax and a standing army. Weigh all three before you place your arrow.
 Does Alfred deserve to be remembered as Great? Your lesson wants a view with two reasons, and then the opposite view. Translating books, beating Guthrum and building the burhs are reasons for yes. Fleeing from his kingdom, and the fact that the Danelaw remained in Viking hands, are reasons a critic might give.
 Worked example — model it step by step, thinking aloud: Write one reason, with evidence and explanation, that Alfred deserves the title Great. (1) Point: One reason Alfred deserves to be remembered as Great is that he made Wessex safer against future Viking attacks. (2) Evidence: he built burhs, towns with high walls and guard towers, and kept half of his army active at all times. (3) Explain: this meant that when Vikings attacked again, people had somewhere safe to go and an army ready to fight, so Wessex was not overrun. (4) Link back: that is why many people think the title Great is deserved. Answer: Point, evidence, explain: Alfred made Wessex safer; he built burhs and kept half the army ready; so Wessex could resist future attacks, which is a lasting achievement..
@@ -857,7 +857,7 @@
             <a:r>
               <a:rPr lang="en-US" dirty="0"/>
               <a:t>Teach — Alfred's policies, and the title Great. Say it in your own words, then check understanding with a quick question: ask a pupil from the pre-teach group first, since they met these words and ideas before the lesson. Pupils try to recall before you re-explain.
-After defeating the Vikings, Alfred introduced policies to make sure Wessex was better prepared if they came again. Burhs were towns surrounded by high walls and guard towers, to protect the people living there. Alfred used the burhs to collect tax and store the money, so that more burhs could be built. He also decided that half of the army should always be active, so that it was ready at all times. This was one of the first professional armies in Britain.
+After defeating the Vikings, Alfred introduced policies to make sure Wessex was better prepared if they came again. A burh was a town ringed with high walls and watchtowers, so that the people inside could be defended. Alfred used the burhs to collect tax and store the money, so that more burhs could be built. He also decided that half of the army should always be active, so that it was ready at all times. This was one of the first professional armies in Britain.
 Your lesson asked you to judge how well Alfred dealt with the Vikings. Did he beat them? Yes, at Edington. Did he ever run and hide? Yes, in Somerset. Did he learn from his mistakes and prepare better for the future? Yes: burhs, tax and a standing army. Weigh all three before you place your arrow.
 Does Alfred deserve to be remembered as Great? Your lesson wants a view with two reasons, and then the opposite view. Translating books, beating Guthrum and building the burhs are reasons for yes. Fleeing from his kingdom, and the fact that the Danelaw remained in Viking hands, are reasons a critic might give.
 Worked example — model it step by step, thinking aloud: Write one reason, with evidence and explanation, that Alfred deserves the title Great. (1) Point: One reason Alfred deserves to be remembered as Great is that he made Wessex safer against future Viking attacks. (2) Evidence: he built burhs, towns with high walls and guard towers, and kept half of his army active at all times. (3) Explain: this meant that when Vikings attacked again, people had somewhere safe to go and an army ready to fight, so Wessex was not overrun. (4) Link back: that is why many people think the title Great is deserved. Answer: Point, evidence, explain: Alfred made Wessex safer; he built burhs and kept half the army ready; so Wessex could resist future attacks, which is a lasting achievement..
@@ -2255,8 +2255,8 @@
             <a:r>
               <a:rPr lang="en-US" dirty="0"/>
               <a:t>Teach — The Danelaw and the mixing of cultures. Say it in your own words, then check understanding with a quick question: ask a pupil from the pre-teach group first, since they met these words and ideas before the lesson. Pupils try to recall before you re-explain.
-A big part of Britain became known as the Danelaw, where Viking rules and ways of life were followed. That was different from the rest of England, which still had Anglo-Saxon kings. In 878, after his victory at Edington, Alfred agreed the boundaries of the Danelaw with Guthrum.
-Over time, the Vikings and the local people started living together more peacefully. They shared language, clothes, farming ideas and even names. Some English words we use today come from the Viking language, such as sky, egg and window. Place names ending in -by and -thorpe, such as Grimsby, Derby and Scunthorpe, are Viking names that are still used.
+A large stretch of Britain came to be called the Danelaw. Inside it, Viking law and Viking custom decided how people lived. Outside it, the old kingdoms carried on under Anglo-Saxon kings. In 878, after his victory at Edington, Alfred agreed the boundaries of the Danelaw with Guthrum.
+As the years passed, the newcomers and the people already living there settled into a quieter life side by side. Words, clothing, ways of farming and even personal names passed between them. Some English words we use today come from the Viking language, such as sky, egg and window. Place names ending in -by and -thorpe, such as Grimsby, Derby and Scunthorpe, are Viking names that are still used.
 Your lesson asked you to judge how significant the Viking invasion was, on a line from not significant to very significant. A good judgement weighs lasting changes, such as language, place names and the Danelaw, against the fact that in the end England was united under Anglo-Saxon kings. Then it considers the other side of its own argument.
 Tip: Significant means important with lasting effects. Language and place names still used today are strong evidence of significance.</a:t>
             </a:r>
@@ -17000,7 +17000,7 @@
                 <a:ea typeface="Calibri" pitchFamily="34" charset="-122"/>
                 <a:cs typeface="Calibri" pitchFamily="34" charset="-120"/>
               </a:rPr>
-              <a:t>A big part of Britain became known as the Danelaw, where Viking rules and ways of life were followed.</a:t>
+              <a:t>A large stretch of Britain came to be called the Danelaw.</a:t>
             </a:r>
             <a:endParaRPr lang="en-US" sz="2400" dirty="0"/>
           </a:p>
@@ -17120,7 +17120,7 @@
                 <a:ea typeface="Calibri" pitchFamily="34" charset="-122"/>
                 <a:cs typeface="Calibri" pitchFamily="34" charset="-120"/>
               </a:rPr>
-              <a:t>Over time, the Vikings and the local people started living together more peacefully.</a:t>
+              <a:t>As the years passed, the newcomers and the people already living there settled into a quieter life side by side.</a:t>
             </a:r>
             <a:endParaRPr lang="en-US" sz="2400" dirty="0"/>
           </a:p>
